--- a/assets/pptx/catalog-755.pptx
+++ b/assets/pptx/catalog-755.pptx
@@ -3283,7 +3283,7 @@
                 <a:ea typeface="Ebrima"/>
                 <a:cs typeface="Ebrima"/>
               </a:rPr>
-              <a:t>ልጆቹን ፍለጋ ይመጣል (2x)</a:t>
+              <a:t>ልጆቹን ፍለጋ ይመጣል 2x</a:t>
             </a:r>
           </a:p>
         </p:txBody>
@@ -3507,7 +3507,7 @@
                 <a:ea typeface="Ebrima"/>
                 <a:cs typeface="Ebrima"/>
               </a:rPr>
-              <a:t>ልጆቹን ፍለጋ ይመጣል (2x)</a:t>
+              <a:t>ልጆቹን ፍለጋ ይመጣል 2x</a:t>
             </a:r>
           </a:p>
         </p:txBody>
@@ -3731,7 +3731,7 @@
                 <a:ea typeface="Ebrima"/>
                 <a:cs typeface="Ebrima"/>
               </a:rPr>
-              <a:t>ልጆቹን ፍለጋ ይመጣል (2x)</a:t>
+              <a:t>ልጆቹን ፍለጋ ይመጣል 2x</a:t>
             </a:r>
           </a:p>
         </p:txBody>
@@ -3955,7 +3955,7 @@
                 <a:ea typeface="Ebrima"/>
                 <a:cs typeface="Ebrima"/>
               </a:rPr>
-              <a:t>ልጆቹን ፍለጋ ይመጣል (2x)</a:t>
+              <a:t>ልጆቹን ፍለጋ ይመጣል 2x</a:t>
             </a:r>
           </a:p>
         </p:txBody>
